--- a/root/images/33-DeveloperGuide/DevProjectStructure.pptx
+++ b/root/images/33-DeveloperGuide/DevProjectStructure.pptx
@@ -302,7 +302,7 @@
           <a:p>
             <a:fld id="{C768F07E-94A8-3E45-A25A-D7AA252360FE}" type="datetimeFigureOut">
               <a:rPr lang="nl-NL" smtClean="0"/>
-              <a:t>17-05-19</a:t>
+              <a:t>06-08-2026</a:t>
             </a:fld>
             <a:endParaRPr lang="nl-NL"/>
           </a:p>
@@ -344,7 +344,7 @@
           <a:p>
             <a:fld id="{3D28D320-24CD-8A40-8A68-D9DD24EF5B3B}" type="slidenum">
               <a:rPr lang="nl-NL" smtClean="0"/>
-              <a:t>‹#›</a:t>
+              <a:t>‹nr.›</a:t>
             </a:fld>
             <a:endParaRPr lang="nl-NL"/>
           </a:p>
@@ -470,7 +470,7 @@
           <a:p>
             <a:fld id="{C768F07E-94A8-3E45-A25A-D7AA252360FE}" type="datetimeFigureOut">
               <a:rPr lang="nl-NL" smtClean="0"/>
-              <a:t>17-05-19</a:t>
+              <a:t>06-08-2026</a:t>
             </a:fld>
             <a:endParaRPr lang="nl-NL"/>
           </a:p>
@@ -512,7 +512,7 @@
           <a:p>
             <a:fld id="{3D28D320-24CD-8A40-8A68-D9DD24EF5B3B}" type="slidenum">
               <a:rPr lang="nl-NL" smtClean="0"/>
-              <a:t>‹#›</a:t>
+              <a:t>‹nr.›</a:t>
             </a:fld>
             <a:endParaRPr lang="nl-NL"/>
           </a:p>
@@ -648,7 +648,7 @@
           <a:p>
             <a:fld id="{C768F07E-94A8-3E45-A25A-D7AA252360FE}" type="datetimeFigureOut">
               <a:rPr lang="nl-NL" smtClean="0"/>
-              <a:t>17-05-19</a:t>
+              <a:t>06-08-2026</a:t>
             </a:fld>
             <a:endParaRPr lang="nl-NL"/>
           </a:p>
@@ -690,7 +690,7 @@
           <a:p>
             <a:fld id="{3D28D320-24CD-8A40-8A68-D9DD24EF5B3B}" type="slidenum">
               <a:rPr lang="nl-NL" smtClean="0"/>
-              <a:t>‹#›</a:t>
+              <a:t>‹nr.›</a:t>
             </a:fld>
             <a:endParaRPr lang="nl-NL"/>
           </a:p>
@@ -816,7 +816,7 @@
           <a:p>
             <a:fld id="{C768F07E-94A8-3E45-A25A-D7AA252360FE}" type="datetimeFigureOut">
               <a:rPr lang="nl-NL" smtClean="0"/>
-              <a:t>17-05-19</a:t>
+              <a:t>06-08-2026</a:t>
             </a:fld>
             <a:endParaRPr lang="nl-NL"/>
           </a:p>
@@ -858,7 +858,7 @@
           <a:p>
             <a:fld id="{3D28D320-24CD-8A40-8A68-D9DD24EF5B3B}" type="slidenum">
               <a:rPr lang="nl-NL" smtClean="0"/>
-              <a:t>‹#›</a:t>
+              <a:t>‹nr.›</a:t>
             </a:fld>
             <a:endParaRPr lang="nl-NL"/>
           </a:p>
@@ -1061,7 +1061,7 @@
           <a:p>
             <a:fld id="{C768F07E-94A8-3E45-A25A-D7AA252360FE}" type="datetimeFigureOut">
               <a:rPr lang="nl-NL" smtClean="0"/>
-              <a:t>17-05-19</a:t>
+              <a:t>06-08-2026</a:t>
             </a:fld>
             <a:endParaRPr lang="nl-NL"/>
           </a:p>
@@ -1103,7 +1103,7 @@
           <a:p>
             <a:fld id="{3D28D320-24CD-8A40-8A68-D9DD24EF5B3B}" type="slidenum">
               <a:rPr lang="nl-NL" smtClean="0"/>
-              <a:t>‹#›</a:t>
+              <a:t>‹nr.›</a:t>
             </a:fld>
             <a:endParaRPr lang="nl-NL"/>
           </a:p>
@@ -1346,7 +1346,7 @@
           <a:p>
             <a:fld id="{C768F07E-94A8-3E45-A25A-D7AA252360FE}" type="datetimeFigureOut">
               <a:rPr lang="nl-NL" smtClean="0"/>
-              <a:t>17-05-19</a:t>
+              <a:t>06-08-2026</a:t>
             </a:fld>
             <a:endParaRPr lang="nl-NL"/>
           </a:p>
@@ -1388,7 +1388,7 @@
           <a:p>
             <a:fld id="{3D28D320-24CD-8A40-8A68-D9DD24EF5B3B}" type="slidenum">
               <a:rPr lang="nl-NL" smtClean="0"/>
-              <a:t>‹#›</a:t>
+              <a:t>‹nr.›</a:t>
             </a:fld>
             <a:endParaRPr lang="nl-NL"/>
           </a:p>
@@ -1765,7 +1765,7 @@
           <a:p>
             <a:fld id="{C768F07E-94A8-3E45-A25A-D7AA252360FE}" type="datetimeFigureOut">
               <a:rPr lang="nl-NL" smtClean="0"/>
-              <a:t>17-05-19</a:t>
+              <a:t>06-08-2026</a:t>
             </a:fld>
             <a:endParaRPr lang="nl-NL"/>
           </a:p>
@@ -1807,7 +1807,7 @@
           <a:p>
             <a:fld id="{3D28D320-24CD-8A40-8A68-D9DD24EF5B3B}" type="slidenum">
               <a:rPr lang="nl-NL" smtClean="0"/>
-              <a:t>‹#›</a:t>
+              <a:t>‹nr.›</a:t>
             </a:fld>
             <a:endParaRPr lang="nl-NL"/>
           </a:p>
@@ -1882,7 +1882,7 @@
           <a:p>
             <a:fld id="{C768F07E-94A8-3E45-A25A-D7AA252360FE}" type="datetimeFigureOut">
               <a:rPr lang="nl-NL" smtClean="0"/>
-              <a:t>17-05-19</a:t>
+              <a:t>06-08-2026</a:t>
             </a:fld>
             <a:endParaRPr lang="nl-NL"/>
           </a:p>
@@ -1924,7 +1924,7 @@
           <a:p>
             <a:fld id="{3D28D320-24CD-8A40-8A68-D9DD24EF5B3B}" type="slidenum">
               <a:rPr lang="nl-NL" smtClean="0"/>
-              <a:t>‹#›</a:t>
+              <a:t>‹nr.›</a:t>
             </a:fld>
             <a:endParaRPr lang="nl-NL"/>
           </a:p>
@@ -1977,7 +1977,7 @@
           <a:p>
             <a:fld id="{C768F07E-94A8-3E45-A25A-D7AA252360FE}" type="datetimeFigureOut">
               <a:rPr lang="nl-NL" smtClean="0"/>
-              <a:t>17-05-19</a:t>
+              <a:t>06-08-2026</a:t>
             </a:fld>
             <a:endParaRPr lang="nl-NL"/>
           </a:p>
@@ -2019,7 +2019,7 @@
           <a:p>
             <a:fld id="{3D28D320-24CD-8A40-8A68-D9DD24EF5B3B}" type="slidenum">
               <a:rPr lang="nl-NL" smtClean="0"/>
-              <a:t>‹#›</a:t>
+              <a:t>‹nr.›</a:t>
             </a:fld>
             <a:endParaRPr lang="nl-NL"/>
           </a:p>
@@ -2252,7 +2252,7 @@
           <a:p>
             <a:fld id="{C768F07E-94A8-3E45-A25A-D7AA252360FE}" type="datetimeFigureOut">
               <a:rPr lang="nl-NL" smtClean="0"/>
-              <a:t>17-05-19</a:t>
+              <a:t>06-08-2026</a:t>
             </a:fld>
             <a:endParaRPr lang="nl-NL"/>
           </a:p>
@@ -2294,7 +2294,7 @@
           <a:p>
             <a:fld id="{3D28D320-24CD-8A40-8A68-D9DD24EF5B3B}" type="slidenum">
               <a:rPr lang="nl-NL" smtClean="0"/>
-              <a:t>‹#›</a:t>
+              <a:t>‹nr.›</a:t>
             </a:fld>
             <a:endParaRPr lang="nl-NL"/>
           </a:p>
@@ -2504,7 +2504,7 @@
           <a:p>
             <a:fld id="{C768F07E-94A8-3E45-A25A-D7AA252360FE}" type="datetimeFigureOut">
               <a:rPr lang="nl-NL" smtClean="0"/>
-              <a:t>17-05-19</a:t>
+              <a:t>06-08-2026</a:t>
             </a:fld>
             <a:endParaRPr lang="nl-NL"/>
           </a:p>
@@ -2546,7 +2546,7 @@
           <a:p>
             <a:fld id="{3D28D320-24CD-8A40-8A68-D9DD24EF5B3B}" type="slidenum">
               <a:rPr lang="nl-NL" smtClean="0"/>
-              <a:t>‹#›</a:t>
+              <a:t>‹nr.›</a:t>
             </a:fld>
             <a:endParaRPr lang="nl-NL"/>
           </a:p>
@@ -2715,7 +2715,7 @@
           <a:p>
             <a:fld id="{C768F07E-94A8-3E45-A25A-D7AA252360FE}" type="datetimeFigureOut">
               <a:rPr lang="nl-NL" smtClean="0"/>
-              <a:t>17-05-19</a:t>
+              <a:t>06-08-2026</a:t>
             </a:fld>
             <a:endParaRPr lang="nl-NL"/>
           </a:p>
@@ -2793,7 +2793,7 @@
           <a:p>
             <a:fld id="{3D28D320-24CD-8A40-8A68-D9DD24EF5B3B}" type="slidenum">
               <a:rPr lang="nl-NL" smtClean="0"/>
-              <a:t>‹#›</a:t>
+              <a:t>‹nr.›</a:t>
             </a:fld>
             <a:endParaRPr lang="nl-NL"/>
           </a:p>
@@ -3098,7 +3098,7 @@
         </p:nvSpPr>
         <p:spPr>
           <a:xfrm>
-            <a:off x="676401" y="845818"/>
+            <a:off x="676401" y="726874"/>
             <a:ext cx="1406306" cy="313367"/>
           </a:xfrm>
           <a:prstGeom prst="rect">
@@ -3144,7 +3144,7 @@
         </p:nvSpPr>
         <p:spPr>
           <a:xfrm>
-            <a:off x="676401" y="1441944"/>
+            <a:off x="676401" y="1300698"/>
             <a:ext cx="1406306" cy="313367"/>
           </a:xfrm>
           <a:prstGeom prst="rect">
@@ -3185,7 +3185,7 @@
         </p:nvSpPr>
         <p:spPr>
           <a:xfrm>
-            <a:off x="676401" y="1951799"/>
+            <a:off x="676401" y="1810552"/>
             <a:ext cx="1406648" cy="313367"/>
           </a:xfrm>
           <a:prstGeom prst="rect">
@@ -3226,12 +3226,17 @@
         </p:nvSpPr>
         <p:spPr>
           <a:xfrm>
-            <a:off x="6462180" y="2461654"/>
+            <a:off x="7910930" y="2305652"/>
             <a:ext cx="1406648" cy="313367"/>
           </a:xfrm>
           <a:prstGeom prst="rect">
             <a:avLst/>
           </a:prstGeom>
+          <a:ln>
+            <a:solidFill>
+              <a:schemeClr val="accent2"/>
+            </a:solidFill>
+          </a:ln>
         </p:spPr>
         <p:style>
           <a:lnRef idx="2">
@@ -3268,7 +3273,7 @@
         </p:nvSpPr>
         <p:spPr>
           <a:xfrm>
-            <a:off x="676401" y="2461654"/>
+            <a:off x="665717" y="2320408"/>
             <a:ext cx="1406648" cy="313367"/>
           </a:xfrm>
           <a:prstGeom prst="rect">
@@ -3309,7 +3314,7 @@
         </p:nvSpPr>
         <p:spPr>
           <a:xfrm>
-            <a:off x="676401" y="2971509"/>
+            <a:off x="665717" y="2813897"/>
             <a:ext cx="1406648" cy="313367"/>
           </a:xfrm>
           <a:prstGeom prst="rect">
@@ -3350,7 +3355,7 @@
         </p:nvSpPr>
         <p:spPr>
           <a:xfrm>
-            <a:off x="676401" y="4501073"/>
+            <a:off x="676401" y="4313226"/>
             <a:ext cx="1406648" cy="313367"/>
           </a:xfrm>
           <a:prstGeom prst="rect">
@@ -3391,7 +3396,7 @@
         </p:nvSpPr>
         <p:spPr>
           <a:xfrm>
-            <a:off x="676401" y="3991219"/>
+            <a:off x="676401" y="3803755"/>
             <a:ext cx="1406648" cy="313367"/>
           </a:xfrm>
           <a:prstGeom prst="rect">
@@ -3433,7 +3438,7 @@
         </p:nvSpPr>
         <p:spPr>
           <a:xfrm>
-            <a:off x="4558277" y="1439187"/>
+            <a:off x="6022518" y="1297941"/>
             <a:ext cx="1406648" cy="313367"/>
           </a:xfrm>
           <a:prstGeom prst="rect">
@@ -3479,7 +3484,7 @@
         </p:nvSpPr>
         <p:spPr>
           <a:xfrm>
-            <a:off x="6462181" y="845818"/>
+            <a:off x="7926422" y="726874"/>
             <a:ext cx="1406648" cy="313367"/>
           </a:xfrm>
           <a:prstGeom prst="rect">
@@ -3530,8 +3535,8 @@
         </p:nvSpPr>
         <p:spPr>
           <a:xfrm>
-            <a:off x="2579963" y="845818"/>
-            <a:ext cx="1406306" cy="313367"/>
+            <a:off x="2579962" y="726874"/>
+            <a:ext cx="2945299" cy="313367"/>
           </a:xfrm>
           <a:prstGeom prst="rect">
             <a:avLst/>
@@ -3576,8 +3581,8 @@
         </p:nvSpPr>
         <p:spPr>
           <a:xfrm>
-            <a:off x="676401" y="274154"/>
-            <a:ext cx="7192427" cy="313367"/>
+            <a:off x="676401" y="155210"/>
+            <a:ext cx="8656668" cy="313367"/>
           </a:xfrm>
           <a:prstGeom prst="rect">
             <a:avLst/>
@@ -3608,10 +3613,9 @@
           <a:p>
             <a:pPr algn="ctr"/>
             <a:r>
-              <a:rPr lang="en-US" sz="1600" b="1" dirty="0" err="1"/>
-              <a:t>SKIRTproject</a:t>
-            </a:r>
-            <a:endParaRPr lang="en-US" sz="1600" b="1" dirty="0"/>
+              <a:rPr lang="en-US" sz="1600" b="1" dirty="0"/>
+              <a:t>SKIRT project</a:t>
+            </a:r>
           </a:p>
         </p:txBody>
       </p:sp>
@@ -3623,12 +3627,15 @@
         </p:nvSpPr>
         <p:spPr>
           <a:xfrm>
-            <a:off x="2579963" y="1951799"/>
+            <a:off x="2579963" y="1802786"/>
             <a:ext cx="1406306" cy="313367"/>
           </a:xfrm>
           <a:prstGeom prst="rect">
             <a:avLst/>
           </a:prstGeom>
+          <a:ln>
+            <a:prstDash val="sysDash"/>
+          </a:ln>
         </p:spPr>
         <p:style>
           <a:lnRef idx="2">
@@ -3665,7 +3672,7 @@
         </p:nvSpPr>
         <p:spPr>
           <a:xfrm>
-            <a:off x="2579963" y="1441944"/>
+            <a:off x="2579963" y="1300698"/>
             <a:ext cx="1406306" cy="313367"/>
           </a:xfrm>
           <a:prstGeom prst="rect">
@@ -3711,12 +3718,15 @@
         </p:nvSpPr>
         <p:spPr>
           <a:xfrm>
-            <a:off x="2579963" y="2971509"/>
+            <a:off x="2579963" y="2806962"/>
             <a:ext cx="1406306" cy="313367"/>
           </a:xfrm>
           <a:prstGeom prst="rect">
             <a:avLst/>
           </a:prstGeom>
+          <a:ln>
+            <a:prstDash val="sysDash"/>
+          </a:ln>
         </p:spPr>
         <p:style>
           <a:lnRef idx="2">
@@ -3739,7 +3749,7 @@
             <a:pPr algn="ctr"/>
             <a:r>
               <a:rPr lang="en-US" sz="1600" dirty="0" err="1"/>
-              <a:t>mpi</a:t>
+              <a:t>tetgen</a:t>
             </a:r>
             <a:endParaRPr lang="en-US" sz="1600" dirty="0"/>
           </a:p>
@@ -3753,7 +3763,7 @@
         </p:nvSpPr>
         <p:spPr>
           <a:xfrm>
-            <a:off x="2579963" y="3991219"/>
+            <a:off x="2579963" y="3811138"/>
             <a:ext cx="1406306" cy="313367"/>
           </a:xfrm>
           <a:prstGeom prst="rect">
@@ -3781,7 +3791,7 @@
             <a:pPr algn="ctr"/>
             <a:r>
               <a:rPr lang="en-US" sz="1600" dirty="0"/>
-              <a:t>core</a:t>
+              <a:t>utils</a:t>
             </a:r>
           </a:p>
         </p:txBody>
@@ -3794,7 +3804,7 @@
         </p:nvSpPr>
         <p:spPr>
           <a:xfrm>
-            <a:off x="2579963" y="4501073"/>
+            <a:off x="2579963" y="4313226"/>
             <a:ext cx="1406306" cy="313367"/>
           </a:xfrm>
           <a:prstGeom prst="rect">
@@ -3822,7 +3832,7 @@
             <a:pPr algn="ctr"/>
             <a:r>
               <a:rPr lang="en-US" sz="1600" dirty="0"/>
-              <a:t>main</a:t>
+              <a:t>tools</a:t>
             </a:r>
           </a:p>
         </p:txBody>
@@ -3835,12 +3845,15 @@
         </p:nvSpPr>
         <p:spPr>
           <a:xfrm>
-            <a:off x="2579963" y="2461654"/>
+            <a:off x="2579963" y="2304874"/>
             <a:ext cx="1406306" cy="313367"/>
           </a:xfrm>
           <a:prstGeom prst="rect">
             <a:avLst/>
           </a:prstGeom>
+          <a:ln>
+            <a:prstDash val="sysDash"/>
+          </a:ln>
         </p:spPr>
         <p:style>
           <a:lnRef idx="2">
@@ -3877,7 +3890,7 @@
         </p:nvSpPr>
         <p:spPr>
           <a:xfrm>
-            <a:off x="2579963" y="3481364"/>
+            <a:off x="2579963" y="3309050"/>
             <a:ext cx="1406306" cy="313367"/>
           </a:xfrm>
           <a:prstGeom prst="rect">
@@ -3905,7 +3918,7 @@
             <a:pPr algn="ctr"/>
             <a:r>
               <a:rPr lang="en-US" sz="1600" dirty="0" err="1"/>
-              <a:t>utils</a:t>
+              <a:t>mpi</a:t>
             </a:r>
             <a:endParaRPr lang="en-US" sz="1600" dirty="0"/>
           </a:p>
@@ -3919,7 +3932,7 @@
         </p:nvSpPr>
         <p:spPr>
           <a:xfrm>
-            <a:off x="676401" y="3481364"/>
+            <a:off x="676401" y="3303594"/>
             <a:ext cx="1406648" cy="313367"/>
           </a:xfrm>
           <a:prstGeom prst="rect">
@@ -3965,7 +3978,7 @@
         </p:nvSpPr>
         <p:spPr>
           <a:xfrm>
-            <a:off x="4558277" y="845818"/>
+            <a:off x="6022518" y="726874"/>
             <a:ext cx="1406648" cy="313367"/>
           </a:xfrm>
           <a:prstGeom prst="rect">
@@ -4017,7 +4030,7 @@
         </p:nvSpPr>
         <p:spPr>
           <a:xfrm>
-            <a:off x="6462181" y="1439187"/>
+            <a:off x="7926422" y="1297941"/>
             <a:ext cx="1406648" cy="313367"/>
           </a:xfrm>
           <a:prstGeom prst="rect">
@@ -4025,7 +4038,7 @@
           </a:prstGeom>
           <a:ln>
             <a:solidFill>
-              <a:srgbClr val="660066"/>
+              <a:schemeClr val="accent2"/>
             </a:solidFill>
           </a:ln>
         </p:spPr>
@@ -4063,7 +4076,7 @@
         </p:nvSpPr>
         <p:spPr>
           <a:xfrm>
-            <a:off x="6462181" y="1949042"/>
+            <a:off x="7907194" y="1807796"/>
             <a:ext cx="1406648" cy="313367"/>
           </a:xfrm>
           <a:prstGeom prst="rect">
@@ -4071,7 +4084,7 @@
           </a:prstGeom>
           <a:ln>
             <a:solidFill>
-              <a:srgbClr val="660066"/>
+              <a:schemeClr val="accent2"/>
             </a:solidFill>
           </a:ln>
         </p:spPr>
@@ -4104,16 +4117,16 @@
       </p:sp>
       <p:sp>
         <p:nvSpPr>
-          <p:cNvPr id="36" name="Ovaal 35"/>
+          <p:cNvPr id="53" name="Uitstel 52"/>
           <p:cNvSpPr/>
           <p:nvPr/>
         </p:nvSpPr>
         <p:spPr>
           <a:xfrm>
-            <a:off x="2528773" y="1896243"/>
-            <a:ext cx="102380" cy="111112"/>
-          </a:xfrm>
-          <a:prstGeom prst="ellipse">
+            <a:off x="1995762" y="4252217"/>
+            <a:ext cx="153207" cy="111819"/>
+          </a:xfrm>
+          <a:prstGeom prst="flowChartDelay">
             <a:avLst/>
           </a:prstGeom>
         </p:spPr>
@@ -4142,16 +4155,16 @@
       </p:sp>
       <p:sp>
         <p:nvSpPr>
-          <p:cNvPr id="37" name="Ovaal 36"/>
+          <p:cNvPr id="54" name="Uitstel 53"/>
           <p:cNvSpPr/>
           <p:nvPr/>
         </p:nvSpPr>
         <p:spPr>
           <a:xfrm>
-            <a:off x="2528773" y="2406098"/>
-            <a:ext cx="102380" cy="111112"/>
-          </a:xfrm>
-          <a:prstGeom prst="ellipse">
+            <a:off x="1995762" y="3747845"/>
+            <a:ext cx="153207" cy="111819"/>
+          </a:xfrm>
+          <a:prstGeom prst="flowChartDelay">
             <a:avLst/>
           </a:prstGeom>
         </p:spPr>
@@ -4180,21 +4193,17 @@
       </p:sp>
       <p:sp>
         <p:nvSpPr>
-          <p:cNvPr id="39" name="Pijl links en omhoog 38"/>
+          <p:cNvPr id="57" name="Uitstel 56"/>
           <p:cNvSpPr/>
           <p:nvPr/>
         </p:nvSpPr>
         <p:spPr>
           <a:xfrm>
-            <a:off x="2454539" y="3903793"/>
-            <a:ext cx="176614" cy="161267"/>
-          </a:xfrm>
-          <a:prstGeom prst="leftUpArrow">
-            <a:avLst>
-              <a:gd name="adj1" fmla="val 37287"/>
-              <a:gd name="adj2" fmla="val 25000"/>
-              <a:gd name="adj3" fmla="val 25000"/>
-            </a:avLst>
+            <a:off x="9240974" y="2267961"/>
+            <a:ext cx="153207" cy="111819"/>
+          </a:xfrm>
+          <a:prstGeom prst="flowChartDelay">
+            <a:avLst/>
           </a:prstGeom>
         </p:spPr>
         <p:style>
@@ -4222,649 +4231,13 @@
       </p:sp>
       <p:sp>
         <p:nvSpPr>
-          <p:cNvPr id="40" name="Pijl links en omhoog 39"/>
-          <p:cNvSpPr/>
-          <p:nvPr/>
-        </p:nvSpPr>
-        <p:spPr>
-          <a:xfrm>
-            <a:off x="2454539" y="4413647"/>
-            <a:ext cx="176614" cy="161267"/>
-          </a:xfrm>
-          <a:prstGeom prst="leftUpArrow">
-            <a:avLst>
-              <a:gd name="adj1" fmla="val 37287"/>
-              <a:gd name="adj2" fmla="val 25000"/>
-              <a:gd name="adj3" fmla="val 25000"/>
-            </a:avLst>
-          </a:prstGeom>
-        </p:spPr>
-        <p:style>
-          <a:lnRef idx="1">
-            <a:schemeClr val="dk1"/>
-          </a:lnRef>
-          <a:fillRef idx="3">
-            <a:schemeClr val="dk1"/>
-          </a:fillRef>
-          <a:effectRef idx="2">
-            <a:schemeClr val="dk1"/>
-          </a:effectRef>
-          <a:fontRef idx="minor">
-            <a:schemeClr val="lt1"/>
-          </a:fontRef>
-        </p:style>
-        <p:txBody>
-          <a:bodyPr rtlCol="0" anchor="ctr"/>
-          <a:lstStyle/>
-          <a:p>
-            <a:pPr algn="ctr"/>
-            <a:endParaRPr lang="nl-NL"/>
-          </a:p>
-        </p:txBody>
-      </p:sp>
-      <p:sp>
-        <p:nvSpPr>
-          <p:cNvPr id="41" name="Pijl links en omhoog 40"/>
-          <p:cNvSpPr/>
-          <p:nvPr/>
-        </p:nvSpPr>
-        <p:spPr>
-          <a:xfrm>
-            <a:off x="566049" y="3903793"/>
-            <a:ext cx="176614" cy="161267"/>
-          </a:xfrm>
-          <a:prstGeom prst="leftUpArrow">
-            <a:avLst>
-              <a:gd name="adj1" fmla="val 37287"/>
-              <a:gd name="adj2" fmla="val 25000"/>
-              <a:gd name="adj3" fmla="val 25000"/>
-            </a:avLst>
-          </a:prstGeom>
-        </p:spPr>
-        <p:style>
-          <a:lnRef idx="1">
-            <a:schemeClr val="dk1"/>
-          </a:lnRef>
-          <a:fillRef idx="3">
-            <a:schemeClr val="dk1"/>
-          </a:fillRef>
-          <a:effectRef idx="2">
-            <a:schemeClr val="dk1"/>
-          </a:effectRef>
-          <a:fontRef idx="minor">
-            <a:schemeClr val="lt1"/>
-          </a:fontRef>
-        </p:style>
-        <p:txBody>
-          <a:bodyPr rtlCol="0" anchor="ctr"/>
-          <a:lstStyle/>
-          <a:p>
-            <a:pPr algn="ctr"/>
-            <a:endParaRPr lang="nl-NL"/>
-          </a:p>
-        </p:txBody>
-      </p:sp>
-      <p:sp>
-        <p:nvSpPr>
-          <p:cNvPr id="42" name="Pijl links en omhoog 41"/>
-          <p:cNvSpPr/>
-          <p:nvPr/>
-        </p:nvSpPr>
-        <p:spPr>
-          <a:xfrm>
-            <a:off x="566049" y="4413647"/>
-            <a:ext cx="176614" cy="161267"/>
-          </a:xfrm>
-          <a:prstGeom prst="leftUpArrow">
-            <a:avLst>
-              <a:gd name="adj1" fmla="val 37287"/>
-              <a:gd name="adj2" fmla="val 25000"/>
-              <a:gd name="adj3" fmla="val 25000"/>
-            </a:avLst>
-          </a:prstGeom>
-        </p:spPr>
-        <p:style>
-          <a:lnRef idx="1">
-            <a:schemeClr val="dk1"/>
-          </a:lnRef>
-          <a:fillRef idx="3">
-            <a:schemeClr val="dk1"/>
-          </a:fillRef>
-          <a:effectRef idx="2">
-            <a:schemeClr val="dk1"/>
-          </a:effectRef>
-          <a:fontRef idx="minor">
-            <a:schemeClr val="lt1"/>
-          </a:fontRef>
-        </p:style>
-        <p:txBody>
-          <a:bodyPr rtlCol="0" anchor="ctr"/>
-          <a:lstStyle/>
-          <a:p>
-            <a:pPr algn="ctr"/>
-            <a:endParaRPr lang="nl-NL"/>
-          </a:p>
-        </p:txBody>
-      </p:sp>
-      <p:sp>
-        <p:nvSpPr>
-          <p:cNvPr id="43" name="Pijl links en omhoog 42"/>
-          <p:cNvSpPr/>
-          <p:nvPr/>
-        </p:nvSpPr>
-        <p:spPr>
-          <a:xfrm>
-            <a:off x="566049" y="3397973"/>
-            <a:ext cx="176614" cy="161267"/>
-          </a:xfrm>
-          <a:prstGeom prst="leftUpArrow">
-            <a:avLst>
-              <a:gd name="adj1" fmla="val 37287"/>
-              <a:gd name="adj2" fmla="val 25000"/>
-              <a:gd name="adj3" fmla="val 25000"/>
-            </a:avLst>
-          </a:prstGeom>
-        </p:spPr>
-        <p:style>
-          <a:lnRef idx="1">
-            <a:schemeClr val="dk1"/>
-          </a:lnRef>
-          <a:fillRef idx="3">
-            <a:schemeClr val="dk1"/>
-          </a:fillRef>
-          <a:effectRef idx="2">
-            <a:schemeClr val="dk1"/>
-          </a:effectRef>
-          <a:fontRef idx="minor">
-            <a:schemeClr val="lt1"/>
-          </a:fontRef>
-        </p:style>
-        <p:txBody>
-          <a:bodyPr rtlCol="0" anchor="ctr"/>
-          <a:lstStyle/>
-          <a:p>
-            <a:pPr algn="ctr"/>
-            <a:endParaRPr lang="nl-NL"/>
-          </a:p>
-        </p:txBody>
-      </p:sp>
-      <p:sp>
-        <p:nvSpPr>
-          <p:cNvPr id="44" name="Pijl links en omhoog 43"/>
-          <p:cNvSpPr/>
-          <p:nvPr/>
-        </p:nvSpPr>
-        <p:spPr>
-          <a:xfrm>
-            <a:off x="566049" y="2875137"/>
-            <a:ext cx="176614" cy="161267"/>
-          </a:xfrm>
-          <a:prstGeom prst="leftUpArrow">
-            <a:avLst>
-              <a:gd name="adj1" fmla="val 37287"/>
-              <a:gd name="adj2" fmla="val 25000"/>
-              <a:gd name="adj3" fmla="val 25000"/>
-            </a:avLst>
-          </a:prstGeom>
-        </p:spPr>
-        <p:style>
-          <a:lnRef idx="1">
-            <a:schemeClr val="dk1"/>
-          </a:lnRef>
-          <a:fillRef idx="3">
-            <a:schemeClr val="dk1"/>
-          </a:fillRef>
-          <a:effectRef idx="2">
-            <a:schemeClr val="dk1"/>
-          </a:effectRef>
-          <a:fontRef idx="minor">
-            <a:schemeClr val="lt1"/>
-          </a:fontRef>
-        </p:style>
-        <p:txBody>
-          <a:bodyPr rtlCol="0" anchor="ctr"/>
-          <a:lstStyle/>
-          <a:p>
-            <a:pPr algn="ctr"/>
-            <a:endParaRPr lang="nl-NL"/>
-          </a:p>
-        </p:txBody>
-      </p:sp>
-      <p:sp>
-        <p:nvSpPr>
-          <p:cNvPr id="45" name="Pijl links en omhoog 44"/>
-          <p:cNvSpPr/>
-          <p:nvPr/>
-        </p:nvSpPr>
-        <p:spPr>
-          <a:xfrm>
-            <a:off x="566049" y="2362735"/>
-            <a:ext cx="176614" cy="161267"/>
-          </a:xfrm>
-          <a:prstGeom prst="leftUpArrow">
-            <a:avLst>
-              <a:gd name="adj1" fmla="val 37287"/>
-              <a:gd name="adj2" fmla="val 25000"/>
-              <a:gd name="adj3" fmla="val 25000"/>
-            </a:avLst>
-          </a:prstGeom>
-        </p:spPr>
-        <p:style>
-          <a:lnRef idx="1">
-            <a:schemeClr val="dk1"/>
-          </a:lnRef>
-          <a:fillRef idx="3">
-            <a:schemeClr val="dk1"/>
-          </a:fillRef>
-          <a:effectRef idx="2">
-            <a:schemeClr val="dk1"/>
-          </a:effectRef>
-          <a:fontRef idx="minor">
-            <a:schemeClr val="lt1"/>
-          </a:fontRef>
-        </p:style>
-        <p:txBody>
-          <a:bodyPr rtlCol="0" anchor="ctr"/>
-          <a:lstStyle/>
-          <a:p>
-            <a:pPr algn="ctr"/>
-            <a:endParaRPr lang="nl-NL"/>
-          </a:p>
-        </p:txBody>
-      </p:sp>
-      <p:sp>
-        <p:nvSpPr>
-          <p:cNvPr id="3" name="Pijl omhoog 2"/>
-          <p:cNvSpPr/>
-          <p:nvPr/>
-        </p:nvSpPr>
-        <p:spPr>
-          <a:xfrm rot="18787288">
-            <a:off x="2510260" y="3405139"/>
-            <a:ext cx="129039" cy="154054"/>
-          </a:xfrm>
-          <a:prstGeom prst="upArrow">
-            <a:avLst/>
-          </a:prstGeom>
-        </p:spPr>
-        <p:style>
-          <a:lnRef idx="1">
-            <a:schemeClr val="dk1"/>
-          </a:lnRef>
-          <a:fillRef idx="3">
-            <a:schemeClr val="dk1"/>
-          </a:fillRef>
-          <a:effectRef idx="2">
-            <a:schemeClr val="dk1"/>
-          </a:effectRef>
-          <a:fontRef idx="minor">
-            <a:schemeClr val="lt1"/>
-          </a:fontRef>
-        </p:style>
-        <p:txBody>
-          <a:bodyPr rtlCol="0" anchor="ctr"/>
-          <a:lstStyle/>
-          <a:p>
-            <a:pPr algn="ctr"/>
-            <a:endParaRPr lang="nl-NL"/>
-          </a:p>
-        </p:txBody>
-      </p:sp>
-      <p:sp>
-        <p:nvSpPr>
-          <p:cNvPr id="47" name="Pijl omhoog 46"/>
-          <p:cNvSpPr/>
-          <p:nvPr/>
-        </p:nvSpPr>
-        <p:spPr>
-          <a:xfrm rot="18787288">
-            <a:off x="6397660" y="2388187"/>
-            <a:ext cx="129039" cy="154054"/>
-          </a:xfrm>
-          <a:prstGeom prst="upArrow">
-            <a:avLst/>
-          </a:prstGeom>
-        </p:spPr>
-        <p:style>
-          <a:lnRef idx="1">
-            <a:schemeClr val="dk1"/>
-          </a:lnRef>
-          <a:fillRef idx="3">
-            <a:schemeClr val="dk1"/>
-          </a:fillRef>
-          <a:effectRef idx="2">
-            <a:schemeClr val="dk1"/>
-          </a:effectRef>
-          <a:fontRef idx="minor">
-            <a:schemeClr val="lt1"/>
-          </a:fontRef>
-        </p:style>
-        <p:txBody>
-          <a:bodyPr rtlCol="0" anchor="ctr"/>
-          <a:lstStyle/>
-          <a:p>
-            <a:pPr algn="ctr"/>
-            <a:endParaRPr lang="nl-NL"/>
-          </a:p>
-        </p:txBody>
-      </p:sp>
-      <p:sp>
-        <p:nvSpPr>
-          <p:cNvPr id="49" name="Pijl links en omhoog 48"/>
-          <p:cNvSpPr/>
-          <p:nvPr/>
-        </p:nvSpPr>
-        <p:spPr>
-          <a:xfrm>
-            <a:off x="4436900" y="1358553"/>
-            <a:ext cx="176614" cy="161267"/>
-          </a:xfrm>
-          <a:prstGeom prst="leftUpArrow">
-            <a:avLst>
-              <a:gd name="adj1" fmla="val 37287"/>
-              <a:gd name="adj2" fmla="val 25000"/>
-              <a:gd name="adj3" fmla="val 25000"/>
-            </a:avLst>
-          </a:prstGeom>
-        </p:spPr>
-        <p:style>
-          <a:lnRef idx="1">
-            <a:schemeClr val="dk1"/>
-          </a:lnRef>
-          <a:fillRef idx="3">
-            <a:schemeClr val="dk1"/>
-          </a:fillRef>
-          <a:effectRef idx="2">
-            <a:schemeClr val="dk1"/>
-          </a:effectRef>
-          <a:fontRef idx="minor">
-            <a:schemeClr val="lt1"/>
-          </a:fontRef>
-        </p:style>
-        <p:txBody>
-          <a:bodyPr rtlCol="0" anchor="ctr"/>
-          <a:lstStyle/>
-          <a:p>
-            <a:pPr algn="ctr"/>
-            <a:endParaRPr lang="nl-NL"/>
-          </a:p>
-        </p:txBody>
-      </p:sp>
-      <p:sp>
-        <p:nvSpPr>
-          <p:cNvPr id="50" name="Ovaal 49"/>
-          <p:cNvSpPr/>
-          <p:nvPr/>
-        </p:nvSpPr>
-        <p:spPr>
-          <a:xfrm>
-            <a:off x="625211" y="1896243"/>
-            <a:ext cx="102380" cy="111112"/>
-          </a:xfrm>
-          <a:prstGeom prst="ellipse">
-            <a:avLst/>
-          </a:prstGeom>
-        </p:spPr>
-        <p:style>
-          <a:lnRef idx="1">
-            <a:schemeClr val="dk1"/>
-          </a:lnRef>
-          <a:fillRef idx="3">
-            <a:schemeClr val="dk1"/>
-          </a:fillRef>
-          <a:effectRef idx="2">
-            <a:schemeClr val="dk1"/>
-          </a:effectRef>
-          <a:fontRef idx="minor">
-            <a:schemeClr val="lt1"/>
-          </a:fontRef>
-        </p:style>
-        <p:txBody>
-          <a:bodyPr rtlCol="0" anchor="ctr"/>
-          <a:lstStyle/>
-          <a:p>
-            <a:pPr algn="ctr"/>
-            <a:endParaRPr lang="nl-NL"/>
-          </a:p>
-        </p:txBody>
-      </p:sp>
-      <p:sp>
-        <p:nvSpPr>
-          <p:cNvPr id="51" name="Ovaal 50"/>
-          <p:cNvSpPr/>
-          <p:nvPr/>
-        </p:nvSpPr>
-        <p:spPr>
-          <a:xfrm>
-            <a:off x="625211" y="1386388"/>
-            <a:ext cx="102380" cy="111112"/>
-          </a:xfrm>
-          <a:prstGeom prst="ellipse">
-            <a:avLst/>
-          </a:prstGeom>
-        </p:spPr>
-        <p:style>
-          <a:lnRef idx="1">
-            <a:schemeClr val="dk1"/>
-          </a:lnRef>
-          <a:fillRef idx="3">
-            <a:schemeClr val="dk1"/>
-          </a:fillRef>
-          <a:effectRef idx="2">
-            <a:schemeClr val="dk1"/>
-          </a:effectRef>
-          <a:fontRef idx="minor">
-            <a:schemeClr val="lt1"/>
-          </a:fontRef>
-        </p:style>
-        <p:txBody>
-          <a:bodyPr rtlCol="0" anchor="ctr"/>
-          <a:lstStyle/>
-          <a:p>
-            <a:pPr algn="ctr"/>
-            <a:endParaRPr lang="nl-NL"/>
-          </a:p>
-        </p:txBody>
-      </p:sp>
-      <p:sp>
-        <p:nvSpPr>
-          <p:cNvPr id="4" name="Uitstel 3"/>
-          <p:cNvSpPr/>
-          <p:nvPr/>
-        </p:nvSpPr>
-        <p:spPr>
-          <a:xfrm>
-            <a:off x="3909665" y="4445163"/>
-            <a:ext cx="153207" cy="111819"/>
-          </a:xfrm>
-          <a:prstGeom prst="flowChartDelay">
-            <a:avLst/>
-          </a:prstGeom>
-        </p:spPr>
-        <p:style>
-          <a:lnRef idx="1">
-            <a:schemeClr val="dk1"/>
-          </a:lnRef>
-          <a:fillRef idx="3">
-            <a:schemeClr val="dk1"/>
-          </a:fillRef>
-          <a:effectRef idx="2">
-            <a:schemeClr val="dk1"/>
-          </a:effectRef>
-          <a:fontRef idx="minor">
-            <a:schemeClr val="lt1"/>
-          </a:fontRef>
-        </p:style>
-        <p:txBody>
-          <a:bodyPr rtlCol="0" anchor="ctr"/>
-          <a:lstStyle/>
-          <a:p>
-            <a:pPr algn="ctr"/>
-            <a:endParaRPr lang="nl-NL"/>
-          </a:p>
-        </p:txBody>
-      </p:sp>
-      <p:sp>
-        <p:nvSpPr>
-          <p:cNvPr id="53" name="Uitstel 52"/>
-          <p:cNvSpPr/>
-          <p:nvPr/>
-        </p:nvSpPr>
-        <p:spPr>
-          <a:xfrm>
-            <a:off x="1995762" y="4440064"/>
-            <a:ext cx="153207" cy="111819"/>
-          </a:xfrm>
-          <a:prstGeom prst="flowChartDelay">
-            <a:avLst/>
-          </a:prstGeom>
-        </p:spPr>
-        <p:style>
-          <a:lnRef idx="1">
-            <a:schemeClr val="dk1"/>
-          </a:lnRef>
-          <a:fillRef idx="3">
-            <a:schemeClr val="dk1"/>
-          </a:fillRef>
-          <a:effectRef idx="2">
-            <a:schemeClr val="dk1"/>
-          </a:effectRef>
-          <a:fontRef idx="minor">
-            <a:schemeClr val="lt1"/>
-          </a:fontRef>
-        </p:style>
-        <p:txBody>
-          <a:bodyPr rtlCol="0" anchor="ctr"/>
-          <a:lstStyle/>
-          <a:p>
-            <a:pPr algn="ctr"/>
-            <a:endParaRPr lang="nl-NL"/>
-          </a:p>
-        </p:txBody>
-      </p:sp>
-      <p:sp>
-        <p:nvSpPr>
-          <p:cNvPr id="54" name="Uitstel 53"/>
-          <p:cNvSpPr/>
-          <p:nvPr/>
-        </p:nvSpPr>
-        <p:spPr>
-          <a:xfrm>
-            <a:off x="1995762" y="3935309"/>
-            <a:ext cx="153207" cy="111819"/>
-          </a:xfrm>
-          <a:prstGeom prst="flowChartDelay">
-            <a:avLst/>
-          </a:prstGeom>
-        </p:spPr>
-        <p:style>
-          <a:lnRef idx="1">
-            <a:schemeClr val="dk1"/>
-          </a:lnRef>
-          <a:fillRef idx="3">
-            <a:schemeClr val="dk1"/>
-          </a:fillRef>
-          <a:effectRef idx="2">
-            <a:schemeClr val="dk1"/>
-          </a:effectRef>
-          <a:fontRef idx="minor">
-            <a:schemeClr val="lt1"/>
-          </a:fontRef>
-        </p:style>
-        <p:txBody>
-          <a:bodyPr rtlCol="0" anchor="ctr"/>
-          <a:lstStyle/>
-          <a:p>
-            <a:pPr algn="ctr"/>
-            <a:endParaRPr lang="nl-NL"/>
-          </a:p>
-        </p:txBody>
-      </p:sp>
-      <p:sp>
-        <p:nvSpPr>
-          <p:cNvPr id="56" name="Uitstel 55"/>
-          <p:cNvSpPr/>
-          <p:nvPr/>
-        </p:nvSpPr>
-        <p:spPr>
-          <a:xfrm>
-            <a:off x="5888321" y="1383277"/>
-            <a:ext cx="153207" cy="111819"/>
-          </a:xfrm>
-          <a:prstGeom prst="flowChartDelay">
-            <a:avLst/>
-          </a:prstGeom>
-        </p:spPr>
-        <p:style>
-          <a:lnRef idx="1">
-            <a:schemeClr val="dk1"/>
-          </a:lnRef>
-          <a:fillRef idx="3">
-            <a:schemeClr val="dk1"/>
-          </a:fillRef>
-          <a:effectRef idx="2">
-            <a:schemeClr val="dk1"/>
-          </a:effectRef>
-          <a:fontRef idx="minor">
-            <a:schemeClr val="lt1"/>
-          </a:fontRef>
-        </p:style>
-        <p:txBody>
-          <a:bodyPr rtlCol="0" anchor="ctr"/>
-          <a:lstStyle/>
-          <a:p>
-            <a:pPr algn="ctr"/>
-            <a:endParaRPr lang="nl-NL"/>
-          </a:p>
-        </p:txBody>
-      </p:sp>
-      <p:sp>
-        <p:nvSpPr>
-          <p:cNvPr id="57" name="Uitstel 56"/>
-          <p:cNvSpPr/>
-          <p:nvPr/>
-        </p:nvSpPr>
-        <p:spPr>
-          <a:xfrm>
-            <a:off x="7792224" y="2415974"/>
-            <a:ext cx="153207" cy="111819"/>
-          </a:xfrm>
-          <a:prstGeom prst="flowChartDelay">
-            <a:avLst/>
-          </a:prstGeom>
-        </p:spPr>
-        <p:style>
-          <a:lnRef idx="1">
-            <a:schemeClr val="dk1"/>
-          </a:lnRef>
-          <a:fillRef idx="3">
-            <a:schemeClr val="dk1"/>
-          </a:fillRef>
-          <a:effectRef idx="2">
-            <a:schemeClr val="dk1"/>
-          </a:effectRef>
-          <a:fontRef idx="minor">
-            <a:schemeClr val="lt1"/>
-          </a:fontRef>
-        </p:style>
-        <p:txBody>
-          <a:bodyPr rtlCol="0" anchor="ctr"/>
-          <a:lstStyle/>
-          <a:p>
-            <a:pPr algn="ctr"/>
-            <a:endParaRPr lang="nl-NL"/>
-          </a:p>
-        </p:txBody>
-      </p:sp>
-      <p:sp>
-        <p:nvSpPr>
           <p:cNvPr id="58" name="Rechthoek 57"/>
           <p:cNvSpPr/>
           <p:nvPr/>
         </p:nvSpPr>
         <p:spPr>
           <a:xfrm>
-            <a:off x="4401883" y="2475465"/>
+            <a:off x="6723982" y="3203691"/>
             <a:ext cx="308884" cy="127902"/>
           </a:xfrm>
           <a:prstGeom prst="rect">
@@ -4910,7 +4283,7 @@
         </p:nvSpPr>
         <p:spPr>
           <a:xfrm>
-            <a:off x="4740399" y="2381074"/>
+            <a:off x="7062498" y="3109300"/>
             <a:ext cx="1548020" cy="276999"/>
           </a:xfrm>
           <a:prstGeom prst="rect">
@@ -4939,7 +4312,7 @@
         </p:nvSpPr>
         <p:spPr>
           <a:xfrm>
-            <a:off x="4726911" y="4307066"/>
+            <a:off x="7049010" y="4712559"/>
             <a:ext cx="1863908" cy="276999"/>
           </a:xfrm>
           <a:prstGeom prst="rect">
@@ -4968,7 +4341,7 @@
         </p:nvSpPr>
         <p:spPr>
           <a:xfrm>
-            <a:off x="4401883" y="2720345"/>
+            <a:off x="6723982" y="3448571"/>
             <a:ext cx="308884" cy="127902"/>
           </a:xfrm>
           <a:prstGeom prst="rect">
@@ -5012,7 +4385,7 @@
         </p:nvSpPr>
         <p:spPr>
           <a:xfrm>
-            <a:off x="4740399" y="2629731"/>
+            <a:off x="7062498" y="3357957"/>
             <a:ext cx="474745" cy="276999"/>
           </a:xfrm>
           <a:prstGeom prst="rect">
@@ -5041,7 +4414,7 @@
         </p:nvSpPr>
         <p:spPr>
           <a:xfrm>
-            <a:off x="4401883" y="2952043"/>
+            <a:off x="6723982" y="3680269"/>
             <a:ext cx="308884" cy="127902"/>
           </a:xfrm>
           <a:prstGeom prst="rect">
@@ -5050,7 +4423,7 @@
           <a:noFill/>
           <a:ln>
             <a:solidFill>
-              <a:srgbClr val="660066"/>
+              <a:schemeClr val="accent2"/>
             </a:solidFill>
           </a:ln>
         </p:spPr>
@@ -5085,7 +4458,7 @@
         </p:nvSpPr>
         <p:spPr>
           <a:xfrm>
-            <a:off x="4740399" y="2865994"/>
+            <a:off x="7062498" y="3594220"/>
             <a:ext cx="1159768" cy="276999"/>
           </a:xfrm>
           <a:prstGeom prst="rect">
@@ -5103,111 +4476,6 @@
               <a:rPr lang="en-US" sz="1200" dirty="0"/>
               <a:t>Documentation</a:t>
             </a:r>
-          </a:p>
-        </p:txBody>
-      </p:sp>
-      <p:sp>
-        <p:nvSpPr>
-          <p:cNvPr id="66" name="Ovaal 65"/>
-          <p:cNvSpPr/>
-          <p:nvPr/>
-        </p:nvSpPr>
-        <p:spPr>
-          <a:xfrm>
-            <a:off x="4554980" y="3463684"/>
-            <a:ext cx="102380" cy="111112"/>
-          </a:xfrm>
-          <a:prstGeom prst="ellipse">
-            <a:avLst/>
-          </a:prstGeom>
-        </p:spPr>
-        <p:style>
-          <a:lnRef idx="1">
-            <a:schemeClr val="dk1"/>
-          </a:lnRef>
-          <a:fillRef idx="3">
-            <a:schemeClr val="dk1"/>
-          </a:fillRef>
-          <a:effectRef idx="2">
-            <a:schemeClr val="dk1"/>
-          </a:effectRef>
-          <a:fontRef idx="minor">
-            <a:schemeClr val="lt1"/>
-          </a:fontRef>
-        </p:style>
-        <p:txBody>
-          <a:bodyPr rtlCol="0" anchor="ctr"/>
-          <a:lstStyle/>
-          <a:p>
-            <a:pPr algn="ctr"/>
-            <a:endParaRPr lang="nl-NL"/>
-          </a:p>
-        </p:txBody>
-      </p:sp>
-      <p:sp>
-        <p:nvSpPr>
-          <p:cNvPr id="67" name="Tekstvak 66"/>
-          <p:cNvSpPr txBox="1"/>
-          <p:nvPr/>
-        </p:nvSpPr>
-        <p:spPr>
-          <a:xfrm>
-            <a:off x="4738323" y="3361423"/>
-            <a:ext cx="1800493" cy="276999"/>
-          </a:xfrm>
-          <a:prstGeom prst="rect">
-            <a:avLst/>
-          </a:prstGeom>
-          <a:noFill/>
-        </p:spPr>
-        <p:txBody>
-          <a:bodyPr wrap="none" rtlCol="0">
-            <a:spAutoFit/>
-          </a:bodyPr>
-          <a:lstStyle/>
-          <a:p>
-            <a:r>
-              <a:rPr lang="en-US" sz="1200" dirty="0"/>
-              <a:t>No internal dependencies </a:t>
-            </a:r>
-          </a:p>
-        </p:txBody>
-      </p:sp>
-      <p:sp>
-        <p:nvSpPr>
-          <p:cNvPr id="68" name="Pijl omhoog 67"/>
-          <p:cNvSpPr/>
-          <p:nvPr/>
-        </p:nvSpPr>
-        <p:spPr>
-          <a:xfrm rot="18787288">
-            <a:off x="2510261" y="2897856"/>
-            <a:ext cx="129039" cy="154054"/>
-          </a:xfrm>
-          <a:prstGeom prst="upArrow">
-            <a:avLst/>
-          </a:prstGeom>
-        </p:spPr>
-        <p:style>
-          <a:lnRef idx="1">
-            <a:schemeClr val="dk1"/>
-          </a:lnRef>
-          <a:fillRef idx="3">
-            <a:schemeClr val="dk1"/>
-          </a:fillRef>
-          <a:effectRef idx="2">
-            <a:schemeClr val="dk1"/>
-          </a:effectRef>
-          <a:fontRef idx="minor">
-            <a:schemeClr val="lt1"/>
-          </a:fontRef>
-        </p:style>
-        <p:txBody>
-          <a:bodyPr rtlCol="0" anchor="ctr"/>
-          <a:lstStyle/>
-          <a:p>
-            <a:pPr algn="ctr"/>
-            <a:endParaRPr lang="nl-NL"/>
           </a:p>
         </p:txBody>
       </p:sp>
@@ -5233,7 +4501,7 @@
         </p:blipFill>
         <p:spPr>
           <a:xfrm>
-            <a:off x="790309" y="3382696"/>
+            <a:off x="790309" y="3211714"/>
             <a:ext cx="270333" cy="199216"/>
           </a:xfrm>
           <a:prstGeom prst="rect">
@@ -5263,7 +4531,7 @@
         </p:blipFill>
         <p:spPr>
           <a:xfrm>
-            <a:off x="4657203" y="1339579"/>
+            <a:off x="6121444" y="1198333"/>
             <a:ext cx="270333" cy="199216"/>
           </a:xfrm>
           <a:prstGeom prst="rect">
@@ -5293,7 +4561,7 @@
         </p:blipFill>
         <p:spPr>
           <a:xfrm>
-            <a:off x="4443610" y="4624595"/>
+            <a:off x="6765709" y="5030088"/>
             <a:ext cx="270333" cy="199216"/>
           </a:xfrm>
           <a:prstGeom prst="rect">
@@ -5303,16 +4571,16 @@
       </p:pic>
       <p:sp>
         <p:nvSpPr>
-          <p:cNvPr id="74" name="Pijl omhoog 73"/>
+          <p:cNvPr id="75" name="Uitstel 74"/>
           <p:cNvSpPr/>
           <p:nvPr/>
         </p:nvSpPr>
         <p:spPr>
-          <a:xfrm rot="18787288">
-            <a:off x="4544487" y="3688373"/>
-            <a:ext cx="129039" cy="154054"/>
-          </a:xfrm>
-          <a:prstGeom prst="upArrow">
+          <a:xfrm>
+            <a:off x="6882718" y="4530532"/>
+            <a:ext cx="153207" cy="111819"/>
+          </a:xfrm>
+          <a:prstGeom prst="flowChartDelay">
             <a:avLst/>
           </a:prstGeom>
         </p:spPr>
@@ -5341,51 +4609,13 @@
       </p:sp>
       <p:sp>
         <p:nvSpPr>
-          <p:cNvPr id="75" name="Uitstel 74"/>
-          <p:cNvSpPr/>
-          <p:nvPr/>
-        </p:nvSpPr>
-        <p:spPr>
-          <a:xfrm>
-            <a:off x="4560619" y="3201670"/>
-            <a:ext cx="153207" cy="111819"/>
-          </a:xfrm>
-          <a:prstGeom prst="flowChartDelay">
-            <a:avLst/>
-          </a:prstGeom>
-        </p:spPr>
-        <p:style>
-          <a:lnRef idx="1">
-            <a:schemeClr val="dk1"/>
-          </a:lnRef>
-          <a:fillRef idx="3">
-            <a:schemeClr val="dk1"/>
-          </a:fillRef>
-          <a:effectRef idx="2">
-            <a:schemeClr val="dk1"/>
-          </a:effectRef>
-          <a:fontRef idx="minor">
-            <a:schemeClr val="lt1"/>
-          </a:fontRef>
-        </p:style>
-        <p:txBody>
-          <a:bodyPr rtlCol="0" anchor="ctr"/>
-          <a:lstStyle/>
-          <a:p>
-            <a:pPr algn="ctr"/>
-            <a:endParaRPr lang="nl-NL"/>
-          </a:p>
-        </p:txBody>
-      </p:sp>
-      <p:sp>
-        <p:nvSpPr>
           <p:cNvPr id="76" name="Tekstvak 75"/>
           <p:cNvSpPr txBox="1"/>
           <p:nvPr/>
         </p:nvSpPr>
         <p:spPr>
           <a:xfrm>
-            <a:off x="4740399" y="3106661"/>
+            <a:off x="7062498" y="4435523"/>
             <a:ext cx="866944" cy="276999"/>
           </a:xfrm>
           <a:prstGeom prst="rect">
@@ -5408,121 +4638,13 @@
       </p:sp>
       <p:sp>
         <p:nvSpPr>
-          <p:cNvPr id="77" name="Tekstvak 76"/>
-          <p:cNvSpPr txBox="1"/>
-          <p:nvPr/>
-        </p:nvSpPr>
-        <p:spPr>
-          <a:xfrm>
-            <a:off x="4741538" y="3613571"/>
-            <a:ext cx="1903511" cy="276999"/>
-          </a:xfrm>
-          <a:prstGeom prst="rect">
-            <a:avLst/>
-          </a:prstGeom>
-          <a:noFill/>
-        </p:spPr>
-        <p:txBody>
-          <a:bodyPr wrap="none" rtlCol="0">
-            <a:spAutoFit/>
-          </a:bodyPr>
-          <a:lstStyle/>
-          <a:p>
-            <a:r>
-              <a:rPr lang="en-US" sz="1200" dirty="0"/>
-              <a:t>Depends on ‘fundamentals’ </a:t>
-            </a:r>
-          </a:p>
-        </p:txBody>
-      </p:sp>
-      <p:sp>
-        <p:nvSpPr>
-          <p:cNvPr id="78" name="Tekstvak 77"/>
-          <p:cNvSpPr txBox="1"/>
-          <p:nvPr/>
-        </p:nvSpPr>
-        <p:spPr>
-          <a:xfrm>
-            <a:off x="4733680" y="3877224"/>
-            <a:ext cx="2029856" cy="461665"/>
-          </a:xfrm>
-          <a:prstGeom prst="rect">
-            <a:avLst/>
-          </a:prstGeom>
-          <a:noFill/>
-        </p:spPr>
-        <p:txBody>
-          <a:bodyPr wrap="square" rtlCol="0">
-            <a:spAutoFit/>
-          </a:bodyPr>
-          <a:lstStyle/>
-          <a:p>
-            <a:r>
-              <a:rPr lang="en-US" sz="1200" dirty="0"/>
-              <a:t>Depends on non-</a:t>
-            </a:r>
-            <a:r>
-              <a:rPr lang="en-US" sz="1200" dirty="0" err="1"/>
-              <a:t>executables</a:t>
-            </a:r>
-            <a:r>
-              <a:rPr lang="en-US" sz="1200" dirty="0"/>
-              <a:t> above and to the left</a:t>
-            </a:r>
-          </a:p>
-        </p:txBody>
-      </p:sp>
-      <p:sp>
-        <p:nvSpPr>
-          <p:cNvPr id="79" name="Pijl links en omhoog 78"/>
-          <p:cNvSpPr/>
-          <p:nvPr/>
-        </p:nvSpPr>
-        <p:spPr>
-          <a:xfrm>
-            <a:off x="4515579" y="3948985"/>
-            <a:ext cx="176614" cy="161267"/>
-          </a:xfrm>
-          <a:prstGeom prst="leftUpArrow">
-            <a:avLst>
-              <a:gd name="adj1" fmla="val 37287"/>
-              <a:gd name="adj2" fmla="val 25000"/>
-              <a:gd name="adj3" fmla="val 25000"/>
-            </a:avLst>
-          </a:prstGeom>
-        </p:spPr>
-        <p:style>
-          <a:lnRef idx="1">
-            <a:schemeClr val="dk1"/>
-          </a:lnRef>
-          <a:fillRef idx="3">
-            <a:schemeClr val="dk1"/>
-          </a:fillRef>
-          <a:effectRef idx="2">
-            <a:schemeClr val="dk1"/>
-          </a:effectRef>
-          <a:fontRef idx="minor">
-            <a:schemeClr val="lt1"/>
-          </a:fontRef>
-        </p:style>
-        <p:txBody>
-          <a:bodyPr rtlCol="0" anchor="ctr"/>
-          <a:lstStyle/>
-          <a:p>
-            <a:pPr algn="ctr"/>
-            <a:endParaRPr lang="nl-NL"/>
-          </a:p>
-        </p:txBody>
-      </p:sp>
-      <p:sp>
-        <p:nvSpPr>
           <p:cNvPr id="8" name="Afgeronde rechthoek 7"/>
           <p:cNvSpPr/>
           <p:nvPr/>
         </p:nvSpPr>
         <p:spPr>
           <a:xfrm>
-            <a:off x="2722910" y="2894172"/>
+            <a:off x="2712622" y="3237139"/>
             <a:ext cx="319740" cy="149160"/>
           </a:xfrm>
           <a:prstGeom prst="roundRect">
@@ -5563,7 +4685,7 @@
         </p:nvSpPr>
         <p:spPr>
           <a:xfrm>
-            <a:off x="4402613" y="4372781"/>
+            <a:off x="6724712" y="4778274"/>
             <a:ext cx="319740" cy="149160"/>
           </a:xfrm>
           <a:prstGeom prst="roundRect">
@@ -5604,7 +4726,7 @@
         </p:nvSpPr>
         <p:spPr>
           <a:xfrm>
-            <a:off x="4737991" y="4580673"/>
+            <a:off x="7060090" y="4986166"/>
             <a:ext cx="1788320" cy="276999"/>
           </a:xfrm>
           <a:prstGeom prst="rect">
@@ -5630,6 +4752,803 @@
               <a:rPr lang="en-US" sz="1200" dirty="0"/>
               <a:t> (required)</a:t>
             </a:r>
+          </a:p>
+        </p:txBody>
+      </p:sp>
+      <p:sp>
+        <p:nvSpPr>
+          <p:cNvPr id="2" name="Rechthoek 1">
+            <a:extLst>
+              <a:ext uri="{FF2B5EF4-FFF2-40B4-BE49-F238E27FC236}">
+                <a16:creationId xmlns:a16="http://schemas.microsoft.com/office/drawing/2014/main" id="{0331B57A-AB09-B7B0-62FF-04F1819F2DED}"/>
+              </a:ext>
+            </a:extLst>
+          </p:cNvPr>
+          <p:cNvSpPr/>
+          <p:nvPr/>
+        </p:nvSpPr>
+        <p:spPr>
+          <a:xfrm>
+            <a:off x="6723978" y="3922319"/>
+            <a:ext cx="308884" cy="127902"/>
+          </a:xfrm>
+          <a:prstGeom prst="rect">
+            <a:avLst/>
+          </a:prstGeom>
+          <a:noFill/>
+          <a:ln>
+            <a:solidFill>
+              <a:schemeClr val="tx1"/>
+            </a:solidFill>
+            <a:prstDash val="sysDash"/>
+          </a:ln>
+        </p:spPr>
+        <p:style>
+          <a:lnRef idx="2">
+            <a:schemeClr val="dk1"/>
+          </a:lnRef>
+          <a:fillRef idx="1">
+            <a:schemeClr val="lt1"/>
+          </a:fillRef>
+          <a:effectRef idx="0">
+            <a:schemeClr val="dk1"/>
+          </a:effectRef>
+          <a:fontRef idx="minor">
+            <a:schemeClr val="dk1"/>
+          </a:fontRef>
+        </p:style>
+        <p:txBody>
+          <a:bodyPr rtlCol="0" anchor="ctr"/>
+          <a:lstStyle/>
+          <a:p>
+            <a:pPr algn="ctr"/>
+            <a:endParaRPr lang="en-US" sz="1600" dirty="0"/>
+          </a:p>
+        </p:txBody>
+      </p:sp>
+      <p:sp>
+        <p:nvSpPr>
+          <p:cNvPr id="7" name="Tekstvak 6">
+            <a:extLst>
+              <a:ext uri="{FF2B5EF4-FFF2-40B4-BE49-F238E27FC236}">
+                <a16:creationId xmlns:a16="http://schemas.microsoft.com/office/drawing/2014/main" id="{AEA1EA6C-782D-E7A3-5F3A-4B4AA6615C7A}"/>
+              </a:ext>
+            </a:extLst>
+          </p:cNvPr>
+          <p:cNvSpPr txBox="1"/>
+          <p:nvPr/>
+        </p:nvSpPr>
+        <p:spPr>
+          <a:xfrm>
+            <a:off x="7062494" y="3836270"/>
+            <a:ext cx="1669816" cy="276999"/>
+          </a:xfrm>
+          <a:prstGeom prst="rect">
+            <a:avLst/>
+          </a:prstGeom>
+          <a:noFill/>
+        </p:spPr>
+        <p:txBody>
+          <a:bodyPr wrap="none" rtlCol="0">
+            <a:spAutoFit/>
+          </a:bodyPr>
+          <a:lstStyle/>
+          <a:p>
+            <a:r>
+              <a:rPr lang="en-US" sz="1200" dirty="0"/>
+              <a:t>Third-party source code</a:t>
+            </a:r>
+          </a:p>
+        </p:txBody>
+      </p:sp>
+      <p:sp>
+        <p:nvSpPr>
+          <p:cNvPr id="9" name="Rechthoek 8">
+            <a:extLst>
+              <a:ext uri="{FF2B5EF4-FFF2-40B4-BE49-F238E27FC236}">
+                <a16:creationId xmlns:a16="http://schemas.microsoft.com/office/drawing/2014/main" id="{46421457-9DAE-065C-63B1-E525DD26DF4E}"/>
+              </a:ext>
+            </a:extLst>
+          </p:cNvPr>
+          <p:cNvSpPr/>
+          <p:nvPr/>
+        </p:nvSpPr>
+        <p:spPr>
+          <a:xfrm>
+            <a:off x="6723978" y="4164614"/>
+            <a:ext cx="308884" cy="127902"/>
+          </a:xfrm>
+          <a:prstGeom prst="rect">
+            <a:avLst/>
+          </a:prstGeom>
+          <a:noFill/>
+          <a:ln>
+            <a:solidFill>
+              <a:schemeClr val="tx1"/>
+            </a:solidFill>
+          </a:ln>
+        </p:spPr>
+        <p:style>
+          <a:lnRef idx="2">
+            <a:schemeClr val="dk1"/>
+          </a:lnRef>
+          <a:fillRef idx="1">
+            <a:schemeClr val="lt1"/>
+          </a:fillRef>
+          <a:effectRef idx="0">
+            <a:schemeClr val="dk1"/>
+          </a:effectRef>
+          <a:fontRef idx="minor">
+            <a:schemeClr val="dk1"/>
+          </a:fontRef>
+        </p:style>
+        <p:txBody>
+          <a:bodyPr rtlCol="0" anchor="ctr"/>
+          <a:lstStyle/>
+          <a:p>
+            <a:pPr algn="ctr"/>
+            <a:endParaRPr lang="en-US" sz="1600" dirty="0"/>
+          </a:p>
+        </p:txBody>
+      </p:sp>
+      <p:sp>
+        <p:nvSpPr>
+          <p:cNvPr id="10" name="Tekstvak 9">
+            <a:extLst>
+              <a:ext uri="{FF2B5EF4-FFF2-40B4-BE49-F238E27FC236}">
+                <a16:creationId xmlns:a16="http://schemas.microsoft.com/office/drawing/2014/main" id="{F4393B31-EBF8-0475-8C44-0088B4E3E1FC}"/>
+              </a:ext>
+            </a:extLst>
+          </p:cNvPr>
+          <p:cNvSpPr txBox="1"/>
+          <p:nvPr/>
+        </p:nvSpPr>
+        <p:spPr>
+          <a:xfrm>
+            <a:off x="7062494" y="4078565"/>
+            <a:ext cx="948978" cy="276999"/>
+          </a:xfrm>
+          <a:prstGeom prst="rect">
+            <a:avLst/>
+          </a:prstGeom>
+          <a:noFill/>
+        </p:spPr>
+        <p:txBody>
+          <a:bodyPr wrap="none" rtlCol="0">
+            <a:spAutoFit/>
+          </a:bodyPr>
+          <a:lstStyle/>
+          <a:p>
+            <a:r>
+              <a:rPr lang="en-US" sz="1200" dirty="0"/>
+              <a:t>Source code</a:t>
+            </a:r>
+          </a:p>
+        </p:txBody>
+      </p:sp>
+      <p:sp>
+        <p:nvSpPr>
+          <p:cNvPr id="12" name="Rechthoek 11">
+            <a:extLst>
+              <a:ext uri="{FF2B5EF4-FFF2-40B4-BE49-F238E27FC236}">
+                <a16:creationId xmlns:a16="http://schemas.microsoft.com/office/drawing/2014/main" id="{6F6E733A-82A6-B5EF-9EC7-A95E3B5E794A}"/>
+              </a:ext>
+            </a:extLst>
+          </p:cNvPr>
+          <p:cNvSpPr/>
+          <p:nvPr/>
+        </p:nvSpPr>
+        <p:spPr>
+          <a:xfrm>
+            <a:off x="4118956" y="1802785"/>
+            <a:ext cx="1406306" cy="313367"/>
+          </a:xfrm>
+          <a:prstGeom prst="rect">
+            <a:avLst/>
+          </a:prstGeom>
+          <a:ln>
+            <a:prstDash val="solid"/>
+          </a:ln>
+        </p:spPr>
+        <p:style>
+          <a:lnRef idx="2">
+            <a:schemeClr val="dk1"/>
+          </a:lnRef>
+          <a:fillRef idx="1">
+            <a:schemeClr val="lt1"/>
+          </a:fillRef>
+          <a:effectRef idx="0">
+            <a:schemeClr val="dk1"/>
+          </a:effectRef>
+          <a:fontRef idx="minor">
+            <a:schemeClr val="dk1"/>
+          </a:fontRef>
+        </p:style>
+        <p:txBody>
+          <a:bodyPr rtlCol="0" anchor="ctr"/>
+          <a:lstStyle/>
+          <a:p>
+            <a:pPr algn="ctr"/>
+            <a:r>
+              <a:rPr lang="en-US" sz="1600" dirty="0"/>
+              <a:t>geometry</a:t>
+            </a:r>
+          </a:p>
+        </p:txBody>
+      </p:sp>
+      <p:sp>
+        <p:nvSpPr>
+          <p:cNvPr id="13" name="Rechthoek 12">
+            <a:extLst>
+              <a:ext uri="{FF2B5EF4-FFF2-40B4-BE49-F238E27FC236}">
+                <a16:creationId xmlns:a16="http://schemas.microsoft.com/office/drawing/2014/main" id="{F2BA662B-2E00-EF22-4491-731BFC4E5318}"/>
+              </a:ext>
+            </a:extLst>
+          </p:cNvPr>
+          <p:cNvSpPr/>
+          <p:nvPr/>
+        </p:nvSpPr>
+        <p:spPr>
+          <a:xfrm>
+            <a:off x="4118956" y="1300191"/>
+            <a:ext cx="1406306" cy="313367"/>
+          </a:xfrm>
+          <a:prstGeom prst="rect">
+            <a:avLst/>
+          </a:prstGeom>
+          <a:ln>
+            <a:solidFill>
+              <a:schemeClr val="tx1"/>
+            </a:solidFill>
+          </a:ln>
+        </p:spPr>
+        <p:style>
+          <a:lnRef idx="2">
+            <a:schemeClr val="dk1"/>
+          </a:lnRef>
+          <a:fillRef idx="1">
+            <a:schemeClr val="lt1"/>
+          </a:fillRef>
+          <a:effectRef idx="0">
+            <a:schemeClr val="dk1"/>
+          </a:effectRef>
+          <a:fontRef idx="minor">
+            <a:schemeClr val="dk1"/>
+          </a:fontRef>
+        </p:style>
+        <p:txBody>
+          <a:bodyPr rtlCol="0" anchor="ctr"/>
+          <a:lstStyle/>
+          <a:p>
+            <a:pPr algn="ctr"/>
+            <a:r>
+              <a:rPr lang="en-US" sz="1600" dirty="0"/>
+              <a:t>sed</a:t>
+            </a:r>
+          </a:p>
+        </p:txBody>
+      </p:sp>
+      <p:sp>
+        <p:nvSpPr>
+          <p:cNvPr id="14" name="Rechthoek 13">
+            <a:extLst>
+              <a:ext uri="{FF2B5EF4-FFF2-40B4-BE49-F238E27FC236}">
+                <a16:creationId xmlns:a16="http://schemas.microsoft.com/office/drawing/2014/main" id="{ABD70DA8-BA53-E61B-59A9-345388D7C7D4}"/>
+              </a:ext>
+            </a:extLst>
+          </p:cNvPr>
+          <p:cNvSpPr/>
+          <p:nvPr/>
+        </p:nvSpPr>
+        <p:spPr>
+          <a:xfrm>
+            <a:off x="4118956" y="2806962"/>
+            <a:ext cx="1406306" cy="313367"/>
+          </a:xfrm>
+          <a:prstGeom prst="rect">
+            <a:avLst/>
+          </a:prstGeom>
+        </p:spPr>
+        <p:style>
+          <a:lnRef idx="2">
+            <a:schemeClr val="dk1"/>
+          </a:lnRef>
+          <a:fillRef idx="1">
+            <a:schemeClr val="lt1"/>
+          </a:fillRef>
+          <a:effectRef idx="0">
+            <a:schemeClr val="dk1"/>
+          </a:effectRef>
+          <a:fontRef idx="minor">
+            <a:schemeClr val="dk1"/>
+          </a:fontRef>
+        </p:style>
+        <p:txBody>
+          <a:bodyPr rtlCol="0" anchor="ctr"/>
+          <a:lstStyle/>
+          <a:p>
+            <a:pPr algn="ctr"/>
+            <a:r>
+              <a:rPr lang="en-US" sz="1600" dirty="0"/>
+              <a:t>source</a:t>
+            </a:r>
+          </a:p>
+        </p:txBody>
+      </p:sp>
+      <p:sp>
+        <p:nvSpPr>
+          <p:cNvPr id="15" name="Rechthoek 14">
+            <a:extLst>
+              <a:ext uri="{FF2B5EF4-FFF2-40B4-BE49-F238E27FC236}">
+                <a16:creationId xmlns:a16="http://schemas.microsoft.com/office/drawing/2014/main" id="{D9F75CF8-17D6-1A70-F093-38036EB871BA}"/>
+              </a:ext>
+            </a:extLst>
+          </p:cNvPr>
+          <p:cNvSpPr/>
+          <p:nvPr/>
+        </p:nvSpPr>
+        <p:spPr>
+          <a:xfrm>
+            <a:off x="4118956" y="3799873"/>
+            <a:ext cx="1406306" cy="313367"/>
+          </a:xfrm>
+          <a:prstGeom prst="rect">
+            <a:avLst/>
+          </a:prstGeom>
+        </p:spPr>
+        <p:style>
+          <a:lnRef idx="2">
+            <a:schemeClr val="dk1"/>
+          </a:lnRef>
+          <a:fillRef idx="1">
+            <a:schemeClr val="lt1"/>
+          </a:fillRef>
+          <a:effectRef idx="0">
+            <a:schemeClr val="dk1"/>
+          </a:effectRef>
+          <a:fontRef idx="minor">
+            <a:schemeClr val="dk1"/>
+          </a:fontRef>
+        </p:style>
+        <p:txBody>
+          <a:bodyPr rtlCol="0" anchor="ctr"/>
+          <a:lstStyle/>
+          <a:p>
+            <a:pPr algn="ctr"/>
+            <a:r>
+              <a:rPr lang="en-US" sz="1600" dirty="0"/>
+              <a:t>medium</a:t>
+            </a:r>
+          </a:p>
+        </p:txBody>
+      </p:sp>
+      <p:sp>
+        <p:nvSpPr>
+          <p:cNvPr id="16" name="Rechthoek 15">
+            <a:extLst>
+              <a:ext uri="{FF2B5EF4-FFF2-40B4-BE49-F238E27FC236}">
+                <a16:creationId xmlns:a16="http://schemas.microsoft.com/office/drawing/2014/main" id="{16F64BC4-0FCA-029C-91E3-3725DF971B22}"/>
+              </a:ext>
+            </a:extLst>
+          </p:cNvPr>
+          <p:cNvSpPr/>
+          <p:nvPr/>
+        </p:nvSpPr>
+        <p:spPr>
+          <a:xfrm>
+            <a:off x="4118955" y="4296151"/>
+            <a:ext cx="1406306" cy="313367"/>
+          </a:xfrm>
+          <a:prstGeom prst="rect">
+            <a:avLst/>
+          </a:prstGeom>
+        </p:spPr>
+        <p:style>
+          <a:lnRef idx="2">
+            <a:schemeClr val="dk1"/>
+          </a:lnRef>
+          <a:fillRef idx="1">
+            <a:schemeClr val="lt1"/>
+          </a:fillRef>
+          <a:effectRef idx="0">
+            <a:schemeClr val="dk1"/>
+          </a:effectRef>
+          <a:fontRef idx="minor">
+            <a:schemeClr val="dk1"/>
+          </a:fontRef>
+        </p:style>
+        <p:txBody>
+          <a:bodyPr rtlCol="0" anchor="ctr"/>
+          <a:lstStyle/>
+          <a:p>
+            <a:pPr algn="ctr"/>
+            <a:r>
+              <a:rPr lang="en-US" sz="1600" dirty="0"/>
+              <a:t>instrument</a:t>
+            </a:r>
+          </a:p>
+        </p:txBody>
+      </p:sp>
+      <p:sp>
+        <p:nvSpPr>
+          <p:cNvPr id="17" name="Rechthoek 16">
+            <a:extLst>
+              <a:ext uri="{FF2B5EF4-FFF2-40B4-BE49-F238E27FC236}">
+                <a16:creationId xmlns:a16="http://schemas.microsoft.com/office/drawing/2014/main" id="{FA3810C1-6D50-7AC5-DD0E-3A36FD65DFA8}"/>
+              </a:ext>
+            </a:extLst>
+          </p:cNvPr>
+          <p:cNvSpPr/>
+          <p:nvPr/>
+        </p:nvSpPr>
+        <p:spPr>
+          <a:xfrm>
+            <a:off x="4118956" y="2307223"/>
+            <a:ext cx="1406306" cy="313367"/>
+          </a:xfrm>
+          <a:prstGeom prst="rect">
+            <a:avLst/>
+          </a:prstGeom>
+          <a:ln>
+            <a:prstDash val="solid"/>
+          </a:ln>
+        </p:spPr>
+        <p:style>
+          <a:lnRef idx="2">
+            <a:schemeClr val="dk1"/>
+          </a:lnRef>
+          <a:fillRef idx="1">
+            <a:schemeClr val="lt1"/>
+          </a:fillRef>
+          <a:effectRef idx="0">
+            <a:schemeClr val="dk1"/>
+          </a:effectRef>
+          <a:fontRef idx="minor">
+            <a:schemeClr val="dk1"/>
+          </a:fontRef>
+        </p:style>
+        <p:txBody>
+          <a:bodyPr rtlCol="0" anchor="ctr"/>
+          <a:lstStyle/>
+          <a:p>
+            <a:pPr algn="ctr"/>
+            <a:r>
+              <a:rPr lang="en-US" sz="1600" dirty="0"/>
+              <a:t>wavelength</a:t>
+            </a:r>
+          </a:p>
+        </p:txBody>
+      </p:sp>
+      <p:sp>
+        <p:nvSpPr>
+          <p:cNvPr id="18" name="Rechthoek 17">
+            <a:extLst>
+              <a:ext uri="{FF2B5EF4-FFF2-40B4-BE49-F238E27FC236}">
+                <a16:creationId xmlns:a16="http://schemas.microsoft.com/office/drawing/2014/main" id="{5B3E05FC-3F2C-E9B1-BC04-961F6903C203}"/>
+              </a:ext>
+            </a:extLst>
+          </p:cNvPr>
+          <p:cNvSpPr/>
+          <p:nvPr/>
+        </p:nvSpPr>
+        <p:spPr>
+          <a:xfrm>
+            <a:off x="4118956" y="3303595"/>
+            <a:ext cx="1406306" cy="313367"/>
+          </a:xfrm>
+          <a:prstGeom prst="rect">
+            <a:avLst/>
+          </a:prstGeom>
+        </p:spPr>
+        <p:style>
+          <a:lnRef idx="2">
+            <a:schemeClr val="dk1"/>
+          </a:lnRef>
+          <a:fillRef idx="1">
+            <a:schemeClr val="lt1"/>
+          </a:fillRef>
+          <a:effectRef idx="0">
+            <a:schemeClr val="dk1"/>
+          </a:effectRef>
+          <a:fontRef idx="minor">
+            <a:schemeClr val="dk1"/>
+          </a:fontRef>
+        </p:style>
+        <p:txBody>
+          <a:bodyPr rtlCol="0" anchor="ctr"/>
+          <a:lstStyle/>
+          <a:p>
+            <a:pPr algn="ctr"/>
+            <a:r>
+              <a:rPr lang="en-US" sz="1600" dirty="0"/>
+              <a:t>material</a:t>
+            </a:r>
+          </a:p>
+        </p:txBody>
+      </p:sp>
+      <p:sp>
+        <p:nvSpPr>
+          <p:cNvPr id="21" name="Rechthoek 20">
+            <a:extLst>
+              <a:ext uri="{FF2B5EF4-FFF2-40B4-BE49-F238E27FC236}">
+                <a16:creationId xmlns:a16="http://schemas.microsoft.com/office/drawing/2014/main" id="{961A2642-D5C3-C0AB-6659-1FAE483FD906}"/>
+              </a:ext>
+            </a:extLst>
+          </p:cNvPr>
+          <p:cNvSpPr/>
+          <p:nvPr/>
+        </p:nvSpPr>
+        <p:spPr>
+          <a:xfrm>
+            <a:off x="2579962" y="4815314"/>
+            <a:ext cx="1406306" cy="313367"/>
+          </a:xfrm>
+          <a:prstGeom prst="rect">
+            <a:avLst/>
+          </a:prstGeom>
+        </p:spPr>
+        <p:style>
+          <a:lnRef idx="2">
+            <a:schemeClr val="dk1"/>
+          </a:lnRef>
+          <a:fillRef idx="1">
+            <a:schemeClr val="lt1"/>
+          </a:fillRef>
+          <a:effectRef idx="0">
+            <a:schemeClr val="dk1"/>
+          </a:effectRef>
+          <a:fontRef idx="minor">
+            <a:schemeClr val="dk1"/>
+          </a:fontRef>
+        </p:style>
+        <p:txBody>
+          <a:bodyPr rtlCol="0" anchor="ctr"/>
+          <a:lstStyle/>
+          <a:p>
+            <a:pPr algn="ctr"/>
+            <a:r>
+              <a:rPr lang="en-US" sz="1600" dirty="0"/>
+              <a:t>field</a:t>
+            </a:r>
+          </a:p>
+        </p:txBody>
+      </p:sp>
+      <p:sp>
+        <p:nvSpPr>
+          <p:cNvPr id="22" name="Rechthoek 21">
+            <a:extLst>
+              <a:ext uri="{FF2B5EF4-FFF2-40B4-BE49-F238E27FC236}">
+                <a16:creationId xmlns:a16="http://schemas.microsoft.com/office/drawing/2014/main" id="{CAFE79D9-A69F-8455-7882-69E83E0DCF52}"/>
+              </a:ext>
+            </a:extLst>
+          </p:cNvPr>
+          <p:cNvSpPr/>
+          <p:nvPr/>
+        </p:nvSpPr>
+        <p:spPr>
+          <a:xfrm>
+            <a:off x="2579962" y="5297368"/>
+            <a:ext cx="1406306" cy="313367"/>
+          </a:xfrm>
+          <a:prstGeom prst="rect">
+            <a:avLst/>
+          </a:prstGeom>
+        </p:spPr>
+        <p:style>
+          <a:lnRef idx="2">
+            <a:schemeClr val="dk1"/>
+          </a:lnRef>
+          <a:fillRef idx="1">
+            <a:schemeClr val="lt1"/>
+          </a:fillRef>
+          <a:effectRef idx="0">
+            <a:schemeClr val="dk1"/>
+          </a:effectRef>
+          <a:fontRef idx="minor">
+            <a:schemeClr val="dk1"/>
+          </a:fontRef>
+        </p:style>
+        <p:txBody>
+          <a:bodyPr rtlCol="0" anchor="ctr"/>
+          <a:lstStyle/>
+          <a:p>
+            <a:pPr algn="ctr"/>
+            <a:r>
+              <a:rPr lang="en-US" sz="1600" dirty="0"/>
+              <a:t>grain</a:t>
+            </a:r>
+          </a:p>
+        </p:txBody>
+      </p:sp>
+      <p:sp>
+        <p:nvSpPr>
+          <p:cNvPr id="23" name="Rechthoek 22">
+            <a:extLst>
+              <a:ext uri="{FF2B5EF4-FFF2-40B4-BE49-F238E27FC236}">
+                <a16:creationId xmlns:a16="http://schemas.microsoft.com/office/drawing/2014/main" id="{D35AC80C-3405-A0E5-4E00-33CA8A9E5726}"/>
+              </a:ext>
+            </a:extLst>
+          </p:cNvPr>
+          <p:cNvSpPr/>
+          <p:nvPr/>
+        </p:nvSpPr>
+        <p:spPr>
+          <a:xfrm>
+            <a:off x="4118955" y="4800589"/>
+            <a:ext cx="1406306" cy="313367"/>
+          </a:xfrm>
+          <a:prstGeom prst="rect">
+            <a:avLst/>
+          </a:prstGeom>
+        </p:spPr>
+        <p:style>
+          <a:lnRef idx="2">
+            <a:schemeClr val="dk1"/>
+          </a:lnRef>
+          <a:fillRef idx="1">
+            <a:schemeClr val="lt1"/>
+          </a:fillRef>
+          <a:effectRef idx="0">
+            <a:schemeClr val="dk1"/>
+          </a:effectRef>
+          <a:fontRef idx="minor">
+            <a:schemeClr val="dk1"/>
+          </a:fontRef>
+        </p:style>
+        <p:txBody>
+          <a:bodyPr rtlCol="0" anchor="ctr"/>
+          <a:lstStyle/>
+          <a:p>
+            <a:pPr algn="ctr"/>
+            <a:r>
+              <a:rPr lang="en-US" sz="1600" dirty="0"/>
+              <a:t>probe</a:t>
+            </a:r>
+          </a:p>
+        </p:txBody>
+      </p:sp>
+      <p:sp>
+        <p:nvSpPr>
+          <p:cNvPr id="24" name="Rechthoek 23">
+            <a:extLst>
+              <a:ext uri="{FF2B5EF4-FFF2-40B4-BE49-F238E27FC236}">
+                <a16:creationId xmlns:a16="http://schemas.microsoft.com/office/drawing/2014/main" id="{4D07F739-AFA3-BDD8-F227-933439819C4C}"/>
+              </a:ext>
+            </a:extLst>
+          </p:cNvPr>
+          <p:cNvSpPr/>
+          <p:nvPr/>
+        </p:nvSpPr>
+        <p:spPr>
+          <a:xfrm>
+            <a:off x="4118955" y="5302674"/>
+            <a:ext cx="1406306" cy="313367"/>
+          </a:xfrm>
+          <a:prstGeom prst="rect">
+            <a:avLst/>
+          </a:prstGeom>
+        </p:spPr>
+        <p:style>
+          <a:lnRef idx="2">
+            <a:schemeClr val="dk1"/>
+          </a:lnRef>
+          <a:fillRef idx="1">
+            <a:schemeClr val="lt1"/>
+          </a:fillRef>
+          <a:effectRef idx="0">
+            <a:schemeClr val="dk1"/>
+          </a:effectRef>
+          <a:fontRef idx="minor">
+            <a:schemeClr val="dk1"/>
+          </a:fontRef>
+        </p:style>
+        <p:txBody>
+          <a:bodyPr rtlCol="0" anchor="ctr"/>
+          <a:lstStyle/>
+          <a:p>
+            <a:pPr algn="ctr"/>
+            <a:r>
+              <a:rPr lang="en-US" sz="1600" dirty="0"/>
+              <a:t>simulation</a:t>
+            </a:r>
+          </a:p>
+        </p:txBody>
+      </p:sp>
+      <p:sp>
+        <p:nvSpPr>
+          <p:cNvPr id="25" name="Rechthoek 24">
+            <a:extLst>
+              <a:ext uri="{FF2B5EF4-FFF2-40B4-BE49-F238E27FC236}">
+                <a16:creationId xmlns:a16="http://schemas.microsoft.com/office/drawing/2014/main" id="{FF980D1E-DD7F-C9D5-6662-F7902727BD91}"/>
+              </a:ext>
+            </a:extLst>
+          </p:cNvPr>
+          <p:cNvSpPr/>
+          <p:nvPr/>
+        </p:nvSpPr>
+        <p:spPr>
+          <a:xfrm>
+            <a:off x="6519749" y="3040566"/>
+            <a:ext cx="2483005" cy="2364059"/>
+          </a:xfrm>
+          <a:prstGeom prst="rect">
+            <a:avLst/>
+          </a:prstGeom>
+          <a:noFill/>
+          <a:ln>
+            <a:solidFill>
+              <a:schemeClr val="bg1">
+                <a:lumMod val="85000"/>
+              </a:schemeClr>
+            </a:solidFill>
+            <a:prstDash val="sysDot"/>
+          </a:ln>
+          <a:effectLst/>
+        </p:spPr>
+        <p:style>
+          <a:lnRef idx="1">
+            <a:schemeClr val="accent1"/>
+          </a:lnRef>
+          <a:fillRef idx="3">
+            <a:schemeClr val="accent1"/>
+          </a:fillRef>
+          <a:effectRef idx="2">
+            <a:schemeClr val="accent1"/>
+          </a:effectRef>
+          <a:fontRef idx="minor">
+            <a:schemeClr val="lt1"/>
+          </a:fontRef>
+        </p:style>
+        <p:txBody>
+          <a:bodyPr rtlCol="0" anchor="ctr"/>
+          <a:lstStyle/>
+          <a:p>
+            <a:pPr algn="ctr"/>
+            <a:endParaRPr lang="nl-BE"/>
+          </a:p>
+        </p:txBody>
+      </p:sp>
+      <p:sp>
+        <p:nvSpPr>
+          <p:cNvPr id="19" name="Uitstel 18">
+            <a:extLst>
+              <a:ext uri="{FF2B5EF4-FFF2-40B4-BE49-F238E27FC236}">
+                <a16:creationId xmlns:a16="http://schemas.microsoft.com/office/drawing/2014/main" id="{27CC4EA0-DC5C-01FF-F7F9-82AAA5B571E1}"/>
+              </a:ext>
+            </a:extLst>
+          </p:cNvPr>
+          <p:cNvSpPr/>
+          <p:nvPr/>
+        </p:nvSpPr>
+        <p:spPr>
+          <a:xfrm>
+            <a:off x="5448657" y="5255822"/>
+            <a:ext cx="153207" cy="111819"/>
+          </a:xfrm>
+          <a:prstGeom prst="flowChartDelay">
+            <a:avLst/>
+          </a:prstGeom>
+        </p:spPr>
+        <p:style>
+          <a:lnRef idx="1">
+            <a:schemeClr val="dk1"/>
+          </a:lnRef>
+          <a:fillRef idx="3">
+            <a:schemeClr val="dk1"/>
+          </a:fillRef>
+          <a:effectRef idx="2">
+            <a:schemeClr val="dk1"/>
+          </a:effectRef>
+          <a:fontRef idx="minor">
+            <a:schemeClr val="lt1"/>
+          </a:fontRef>
+        </p:style>
+        <p:txBody>
+          <a:bodyPr rtlCol="0" anchor="ctr"/>
+          <a:lstStyle/>
+          <a:p>
+            <a:pPr algn="ctr"/>
+            <a:endParaRPr lang="nl-NL"/>
           </a:p>
         </p:txBody>
       </p:sp>
